--- a/docs/REDHOOD_rules_intro.pptx
+++ b/docs/REDHOOD_rules_intro.pptx
@@ -8545,7 +8545,7 @@
                           <a:ea typeface="Calibri" pitchFamily="34" charset="-122"/>
                           <a:cs typeface="Calibri" pitchFamily="34" charset="-120"/>
                         </a:rPr>
-                        <a:t>전체 합 (항상 성립)</a:t>
+                        <a:t>상위 눈 3개의 합 (항상 성립)</a:t>
                       </a:r>
                       <a:endParaRPr lang="en-US" sz="1200" dirty="0">
                         <a:latin typeface="Calibri" charset="0"/>
@@ -8613,7 +8613,7 @@
                           <a:ea typeface="Calibri" pitchFamily="34" charset="-122"/>
                           <a:cs typeface="Calibri" pitchFamily="34" charset="-120"/>
                         </a:rPr>
-                        <a:t>부가 없음 — 언제나 보험</a:t>
+                        <a:t>부가 없음 — 레벨업 불가</a:t>
                       </a:r>
                       <a:endParaRPr lang="en-US" sz="1200" dirty="0">
                         <a:latin typeface="Calibri" charset="0"/>
@@ -9123,10 +9123,10 @@
               <a:tblPr/>
               <a:tblGrid>
                 <a:gridCol w="2103120"/>
+                <a:gridCol w="1737360"/>
+                <a:gridCol w="1600200"/>
+                <a:gridCol w="3749040"/>
                 <a:gridCol w="1828800"/>
-                <a:gridCol w="1097280"/>
-                <a:gridCol w="4114800"/>
-                <a:gridCol w="1874520"/>
               </a:tblGrid>
               <a:tr h="457200">
                 <a:tc>
@@ -9624,7 +9624,7 @@
                           <a:ea typeface="Calibri" pitchFamily="34" charset="-122"/>
                           <a:cs typeface="Calibri" pitchFamily="34" charset="-120"/>
                         </a:rPr>
-                        <a:t>전체 합</a:t>
+                        <a:t>같은 눈 합 ×2</a:t>
                       </a:r>
                       <a:endParaRPr lang="en-US" sz="1200" dirty="0">
                         <a:latin typeface="Calibri" charset="0"/>
@@ -9966,7 +9966,7 @@
                           <a:ea typeface="Calibri" pitchFamily="34" charset="-122"/>
                           <a:cs typeface="Calibri" pitchFamily="34" charset="-120"/>
                         </a:rPr>
-                        <a:t>전체 합</a:t>
+                        <a:t>같은 눈 합 ×2</a:t>
                       </a:r>
                       <a:endParaRPr lang="en-US" sz="1200" dirty="0">
                         <a:latin typeface="Calibri" charset="0"/>

--- a/docs/REDHOOD_rules_intro.pptx
+++ b/docs/REDHOOD_rules_intro.pptx
@@ -6196,7 +6196,7 @@
                 <a:ea typeface="Calibri" pitchFamily="34" charset="-122"/>
                 <a:cs typeface="Calibri" pitchFamily="34" charset="-120"/>
               </a:rPr>
-              <a:t>한 전투에서 에이스~식스 점수 합이</a:t>
+              <a:t>상단(에이스~식스) 점수 누적이 40이</a:t>
             </a:r>
             <a:endParaRPr lang="en-US" sz="1250" dirty="0"/>
           </a:p>
@@ -6213,7 +6213,7 @@
                 <a:ea typeface="Calibri" pitchFamily="34" charset="-122"/>
                 <a:cs typeface="Calibri" pitchFamily="34" charset="-120"/>
               </a:rPr>
-              <a:t>63을 넘으면 즉시 추가 피해 35.</a:t>
+              <a:t>될 때마다 즉시 추가 피해 25. 초과분 이월.</a:t>
             </a:r>
             <a:endParaRPr lang="en-US" sz="1250" dirty="0"/>
           </a:p>
@@ -6252,7 +6252,7 @@
                 <a:ea typeface="Calibri" pitchFamily="34" charset="-122"/>
                 <a:cs typeface="Calibri" pitchFamily="34" charset="-120"/>
               </a:rPr>
-              <a:t>전투당 1회</a:t>
+              <a:t>반복 발동</a:t>
             </a:r>
             <a:endParaRPr lang="en-US" sz="1050" dirty="0"/>
           </a:p>
